--- a/material-de-apoyo/Clase2_Presentacion_Screenplay_Web.pptx
+++ b/material-de-apoyo/Clase2_Presentacion_Screenplay_Web.pptx
@@ -9264,7 +9264,7 @@
                 </a:solidFill>
                 <a:latin typeface="Century Gothic"/>
               </a:rPr>
-              <a:t> es verde, </a:t>
+              <a:t>: la prueba pasó. </a:t>
             </a:r>
             <a:r>
               <a:rPr b="0" sz="1600">
@@ -9282,7 +9282,7 @@
                 </a:solidFill>
                 <a:latin typeface="Century Gothic"/>
               </a:rPr>
-              <a:t> es rojo.</a:t>
+              <a:t>: falló.</a:t>
             </a:r>
           </a:p>
           <a:p>
